--- a/Cloud IBM Module 3/Presentation/Cloud_IBM_slide.pptx
+++ b/Cloud IBM Module 3/Presentation/Cloud_IBM_slide.pptx
@@ -123,6 +123,11 @@
       </a:defRPr>
     </a:lvl9pPr>
   </p:defaultTextStyle>
+  <p:extLst>
+    <p:ext uri="{EFAFB233-063F-42B5-8137-9DF3F51BA10A}">
+      <p15:sldGuideLst xmlns:p15="http://schemas.microsoft.com/office/powerpoint/2012/main"/>
+    </p:ext>
+  </p:extLst>
 </p:presentation>
 </file>
 
@@ -981,7 +986,7 @@
           <a:p>
             <a:r>
               <a:rPr lang="vi-VN"/>
-              <a:t>Kết luận, business cần ưu tiên ACH, giao dịch liên ngân hàng và ba pattern nổi bật. Dưới góc nhìn Data Engineer, giá trị của project là biến file thành data product có raw–curated zone, catalog, chất lượng dữ liệu, mô hình serving và khả năng quan sát. S3, Glue và Athena là lựa chọn phù hợp cho PoC serverless cơ bản; Power BI là lớp tiêu thụ. Em không tuyên bố AWS đã chạy hoàn chỉnh, nhưng kiến trúc, control và tiêu chí nghiệm thu đã được thiết kế đủ rõ để triển khai khi tài khoản được cấp quyền</a:t>
+              <a:t>Kết luận, business cần ưu tiên ACH, giao dịch liên ngân hàng và ba pattern nổi bật. Dưới góc nhìn Data Engineer, giá trị của project là biến file thành data product có raw–curated zone, catalog, chất lượng dữ liệu, mô hình serving và khả năng quan sát. S3, Glue và Athena là lựa chọn phù hợp cho PoC serverless cơ bản; Power BI là lớp tiêu thụ. Vì AWS chưa hoàn chỉnh, nhưng kiến trúc, control và tiêu chí nghiệm thu đã được thiết kế đủ rõ để triển khai khi tài khoản được cấp quyền</a:t>
             </a:r>
           </a:p>
           <a:p>
@@ -18080,57 +18085,6 @@
                 </a:solidFill>
               </a:rPr>
               <a:t>và nguồn lực điều tra cho ACH trước</a:t>
-            </a:r>
-          </a:p>
-        </p:txBody>
-      </p:sp>
-      <p:sp>
-        <p:nvSpPr>
-          <p:cNvPr id="16" name="Rectangle 15">
-            <a:extLst>
-              <a:ext uri="{FF2B5EF4-FFF2-40B4-BE49-F238E27FC236}">
-                <a16:creationId xmlns:a16="http://schemas.microsoft.com/office/drawing/2014/main" id="{C89BAB12-CAFA-4392-8A92-AEF946DB4095}"/>
-              </a:ext>
-            </a:extLst>
-          </p:cNvPr>
-          <p:cNvSpPr>
-            <a:spLocks noGrp="1"/>
-          </p:cNvSpPr>
-          <p:nvPr/>
-        </p:nvSpPr>
-        <p:spPr>
-          <a:xfrm>
-            <a:off x="609600" y="6515100"/>
-            <a:ext cx="6667500" cy="190500"/>
-          </a:xfrm>
-          <a:prstGeom prst="rect">
-            <a:avLst/>
-          </a:prstGeom>
-          <a:noFill/>
-          <a:ln w="0">
-            <a:noFill/>
-            <a:prstDash val="solid"/>
-          </a:ln>
-        </p:spPr>
-        <p:txBody>
-          <a:bodyPr/>
-          <a:lstStyle/>
-          <a:p>
-            <a:pPr algn="l">
-              <a:buNone/>
-              <a:defRPr sz="900" b="0">
-                <a:solidFill>
-                  <a:srgbClr val="5C7291"/>
-                </a:solidFill>
-              </a:defRPr>
-            </a:pPr>
-            <a:r>
-              <a:rPr sz="900" b="0">
-                <a:solidFill>
-                  <a:srgbClr val="5C7291"/>
-                </a:solidFill>
-              </a:rPr>
-              <a:t>IBM AML • AWS Cloud Data Engineering PoC</a:t>
             </a:r>
           </a:p>
         </p:txBody>
